--- a/docs/submission/REACTOR_Submission.pptx
+++ b/docs/submission/REACTOR_Submission.pptx
@@ -3841,7 +3841,7 @@
               </a:defRPr>
             </a:pPr>
             <a:r>
-              <a:t>Hands-free kitchen timers: revise ten minutes to seven, create one timer, cancel by verified ID, and speak the confirmed state. Include a still/frame from a live voice run rather than the scripted core test.</a:t>
+              <a:t>Hands-free kitchen timers: the timer backend and correction-aware controller work in offline tests. Live voice attempts have not yet completed the create-and-cancel workflow, so this slide must be updated with a real recording before claiming an end-to-end extension. The unresolved behavior is documented in the repo.</a:t>
             </a:r>
           </a:p>
         </p:txBody>
